--- a/deploy/hub/toss-review/CH2DATA_결제경로.pptx
+++ b/deploy/hub/toss-review/CH2DATA_결제경로.pptx
@@ -13,6 +13,7 @@
     <p:sldId id="261" r:id="rId12"/>
     <p:sldId id="262" r:id="rId13"/>
     <p:sldId id="263" r:id="rId14"/>
+    <p:sldId id="264" r:id="rId15"/>
   </p:sldIdLst>
   <p:sldSz cx="9144000" cy="6858000" type="screen4x3"/>
   <p:notesSz cx="6858000" cy="9144000"/>
@@ -3131,7 +3132,7 @@
           <a:p>
             <a:pPr>
               <a:spcBef>
-                <a:spcPts val="1000"/>
+                <a:spcPts val="800"/>
               </a:spcBef>
               <a:defRPr sz="2000">
                 <a:solidFill>
@@ -3146,7 +3147,7 @@
           <a:p>
             <a:pPr>
               <a:spcBef>
-                <a:spcPts val="1000"/>
+                <a:spcPts val="800"/>
               </a:spcBef>
               <a:defRPr sz="2000">
                 <a:solidFill>
@@ -3161,7 +3162,7 @@
           <a:p>
             <a:pPr>
               <a:spcBef>
-                <a:spcPts val="1000"/>
+                <a:spcPts val="800"/>
               </a:spcBef>
               <a:defRPr sz="2000">
                 <a:solidFill>
@@ -3176,7 +3177,7 @@
           <a:p>
             <a:pPr>
               <a:spcBef>
-                <a:spcPts val="1000"/>
+                <a:spcPts val="800"/>
               </a:spcBef>
               <a:defRPr sz="2000">
                 <a:solidFill>
@@ -3191,7 +3192,7 @@
           <a:p>
             <a:pPr>
               <a:spcBef>
-                <a:spcPts val="1000"/>
+                <a:spcPts val="800"/>
               </a:spcBef>
               <a:defRPr sz="2000">
                 <a:solidFill>
@@ -3200,7 +3201,22 @@
               </a:defRPr>
             </a:pPr>
             <a:r>
-              <a:t>(5) Test PW: Ch2T0ssReview2026</a:t>
+              <a:t>(5) Test PW: (VPS PLATFORM_REVIEW_PASSWORD)</a:t>
+            </a:r>
+          </a:p>
+          <a:p>
+            <a:pPr>
+              <a:spcBef>
+                <a:spcPts val="800"/>
+              </a:spcBef>
+              <a:defRPr sz="1800">
+                <a:solidFill>
+                  <a:srgbClr val="111827"/>
+                </a:solidFill>
+              </a:defRPr>
+            </a:pPr>
+            <a:r>
+              <a:t>(6) MID: ch2datoe5e (API 개별 연동 · 테스트 키)</a:t>
             </a:r>
           </a:p>
         </p:txBody>
@@ -3231,7 +3247,7 @@
         </p:nvSpPr>
         <p:spPr>
           <a:xfrm>
-            <a:off x="640080" y="548640"/>
+            <a:off x="640080" y="731520"/>
             <a:ext cx="7863840" cy="5486400"/>
           </a:xfrm>
           <a:prstGeom prst="rect">
@@ -3253,7 +3269,7 @@
               </a:defRPr>
             </a:pPr>
             <a:r>
-              <a:t>결제경로 제작 유의사항</a:t>
+              <a:t>결제경로 유의사항</a:t>
             </a:r>
           </a:p>
           <a:p>
@@ -3268,7 +3284,7 @@
               </a:defRPr>
             </a:pPr>
             <a:r>
-              <a:t>• PPT 형식으로 제작 (본 파일)</a:t>
+              <a:t>• 월 구독 SaaS (Macro / Macro+FieldNote) — 무형상품</a:t>
             </a:r>
           </a:p>
           <a:p>
@@ -3283,7 +3299,7 @@
               </a:defRPr>
             </a:pPr>
             <a:r>
-              <a:t>• 캡처 화면에 URL을 슬라이드 하단에 표기</a:t>
+              <a:t>• 테스트 키 연동 · 카드 결제창(심사용) 캡처 포함</a:t>
             </a:r>
           </a:p>
           <a:p>
@@ -3298,7 +3314,7 @@
               </a:defRPr>
             </a:pPr>
             <a:r>
-              <a:t>• 무형상품(월 구독 SaaS) — CH2 Macro / Macro+FieldNote</a:t>
+              <a:t>• 운영: 카드 자동결제(빌링) — 가맹 빌링 계약 후 활성화</a:t>
             </a:r>
           </a:p>
           <a:p>
@@ -3313,37 +3329,7 @@
               </a:defRPr>
             </a:pPr>
             <a:r>
-              <a:t>• 로그인 후 구매 — 심사용 이메일·비밀번호 계정 제공</a:t>
-            </a:r>
-          </a:p>
-          <a:p>
-            <a:pPr>
-              <a:spcBef>
-                <a:spcPts val="800"/>
-              </a:spcBef>
-              <a:defRPr sz="1600">
-                <a:solidFill>
-                  <a:srgbClr val="111827"/>
-                </a:solidFill>
-              </a:defRPr>
-            </a:pPr>
-            <a:r>
-              <a:t>• 테스트 결제창 연동 가능 (토스 키 심사 후 활성화)</a:t>
-            </a:r>
-          </a:p>
-          <a:p>
-            <a:pPr>
-              <a:spcBef>
-                <a:spcPts val="800"/>
-              </a:spcBef>
-              <a:defRPr sz="1600">
-                <a:solidFill>
-                  <a:srgbClr val="111827"/>
-                </a:solidFill>
-              </a:defRPr>
-            </a:pPr>
-            <a:r>
-              <a:t>• 비씨카드 인증 화면은 실제 결제 테스트 시 추가 캡처 가능</a:t>
+              <a:t>• 각 슬라이드 하단 URL: https://ch2data.com/subscribe/</a:t>
             </a:r>
           </a:p>
         </p:txBody>
@@ -3374,8 +3360,8 @@
         </p:nvSpPr>
         <p:spPr>
           <a:xfrm>
-            <a:off x="457200" y="228600"/>
-            <a:ext cx="8229600" cy="548640"/>
+            <a:off x="365760" y="182880"/>
+            <a:ext cx="8412480" cy="411480"/>
           </a:xfrm>
           <a:prstGeom prst="rect">
             <a:avLst/>
@@ -3389,7 +3375,7 @@
           <a:lstStyle/>
           <a:p>
             <a:pPr>
-              <a:defRPr sz="2200" b="1">
+              <a:defRPr sz="2000" b="1">
                 <a:solidFill>
                   <a:srgbClr val="3182CE"/>
                 </a:solidFill>
@@ -3409,8 +3395,8 @@
         </p:nvSpPr>
         <p:spPr>
           <a:xfrm>
-            <a:off x="457200" y="731520"/>
-            <a:ext cx="8229600" cy="365760"/>
+            <a:off x="365760" y="566928"/>
+            <a:ext cx="8412480" cy="320040"/>
           </a:xfrm>
           <a:prstGeom prst="rect">
             <a:avLst/>
@@ -3424,14 +3410,14 @@
           <a:lstStyle/>
           <a:p>
             <a:pPr>
-              <a:defRPr sz="1200">
+              <a:defRPr sz="1100">
                 <a:solidFill>
                   <a:srgbClr val="64748B"/>
                 </a:solidFill>
               </a:defRPr>
             </a:pPr>
             <a:r>
-              <a:t>홈페이지 하단 사업자 정보 (캡처 시각: 2026-10-01 10:36)</a:t>
+              <a:t>홈페이지 하단 사업자 정보</a:t>
             </a:r>
           </a:p>
         </p:txBody>
@@ -3452,8 +3438,8 @@
         </p:blipFill>
         <p:spPr>
           <a:xfrm>
-            <a:off x="457200" y="1097280"/>
-            <a:ext cx="8229600" cy="5446059"/>
+            <a:off x="320040" y="960120"/>
+            <a:ext cx="8503920" cy="5638829"/>
           </a:xfrm>
           <a:prstGeom prst="rect">
             <a:avLst/>
@@ -3468,8 +3454,8 @@
         </p:nvSpPr>
         <p:spPr>
           <a:xfrm>
-            <a:off x="457200" y="6263640"/>
-            <a:ext cx="8229600" cy="320040"/>
+            <a:off x="365760" y="6446520"/>
+            <a:ext cx="8412480" cy="274320"/>
           </a:xfrm>
           <a:prstGeom prst="rect">
             <a:avLst/>
@@ -3483,7 +3469,7 @@
           <a:lstStyle/>
           <a:p>
             <a:pPr>
-              <a:defRPr sz="1000">
+              <a:defRPr sz="900">
                 <a:solidFill>
                   <a:srgbClr val="64748B"/>
                 </a:solidFill>
@@ -3521,8 +3507,8 @@
         </p:nvSpPr>
         <p:spPr>
           <a:xfrm>
-            <a:off x="457200" y="228600"/>
-            <a:ext cx="8229600" cy="548640"/>
+            <a:off x="365760" y="182880"/>
+            <a:ext cx="8412480" cy="411480"/>
           </a:xfrm>
           <a:prstGeom prst="rect">
             <a:avLst/>
@@ -3536,7 +3522,7 @@
           <a:lstStyle/>
           <a:p>
             <a:pPr>
-              <a:defRPr sz="2200" b="1">
+              <a:defRPr sz="2000" b="1">
                 <a:solidFill>
                   <a:srgbClr val="3182CE"/>
                 </a:solidFill>
@@ -3556,8 +3542,8 @@
         </p:nvSpPr>
         <p:spPr>
           <a:xfrm>
-            <a:off x="457200" y="731520"/>
-            <a:ext cx="8229600" cy="365760"/>
+            <a:off x="365760" y="566928"/>
+            <a:ext cx="8412480" cy="320040"/>
           </a:xfrm>
           <a:prstGeom prst="rect">
             <a:avLst/>
@@ -3571,7 +3557,7 @@
           <a:lstStyle/>
           <a:p>
             <a:pPr>
-              <a:defRPr sz="1200">
+              <a:defRPr sz="1100">
                 <a:solidFill>
                   <a:srgbClr val="64748B"/>
                 </a:solidFill>
@@ -3599,8 +3585,8 @@
         </p:blipFill>
         <p:spPr>
           <a:xfrm>
-            <a:off x="457200" y="1097280"/>
-            <a:ext cx="8229600" cy="6970955"/>
+            <a:off x="320040" y="960120"/>
+            <a:ext cx="8503920" cy="5713571"/>
           </a:xfrm>
           <a:prstGeom prst="rect">
             <a:avLst/>
@@ -3615,8 +3601,8 @@
         </p:nvSpPr>
         <p:spPr>
           <a:xfrm>
-            <a:off x="457200" y="6263640"/>
-            <a:ext cx="8229600" cy="320040"/>
+            <a:off x="365760" y="6446520"/>
+            <a:ext cx="8412480" cy="274320"/>
           </a:xfrm>
           <a:prstGeom prst="rect">
             <a:avLst/>
@@ -3630,14 +3616,14 @@
           <a:lstStyle/>
           <a:p>
             <a:pPr>
-              <a:defRPr sz="1000">
+              <a:defRPr sz="900">
                 <a:solidFill>
                   <a:srgbClr val="64748B"/>
                 </a:solidFill>
               </a:defRPr>
             </a:pPr>
             <a:r>
-              <a:t>URL: https://ch2data.com/refund/</a:t>
+              <a:t>URL: https://ch2data.com/</a:t>
             </a:r>
           </a:p>
         </p:txBody>
@@ -3668,8 +3654,8 @@
         </p:nvSpPr>
         <p:spPr>
           <a:xfrm>
-            <a:off x="457200" y="228600"/>
-            <a:ext cx="8229600" cy="548640"/>
+            <a:off x="365760" y="182880"/>
+            <a:ext cx="8412480" cy="411480"/>
           </a:xfrm>
           <a:prstGeom prst="rect">
             <a:avLst/>
@@ -3683,7 +3669,7 @@
           <a:lstStyle/>
           <a:p>
             <a:pPr>
-              <a:defRPr sz="2200" b="1">
+              <a:defRPr sz="2000" b="1">
                 <a:solidFill>
                   <a:srgbClr val="3182CE"/>
                 </a:solidFill>
@@ -3703,8 +3689,8 @@
         </p:nvSpPr>
         <p:spPr>
           <a:xfrm>
-            <a:off x="457200" y="731520"/>
-            <a:ext cx="8229600" cy="365760"/>
+            <a:off x="365760" y="566928"/>
+            <a:ext cx="8412480" cy="320040"/>
           </a:xfrm>
           <a:prstGeom prst="rect">
             <a:avLst/>
@@ -3718,21 +3704,21 @@
           <a:lstStyle/>
           <a:p>
             <a:pPr>
-              <a:defRPr sz="1200">
+              <a:defRPr sz="1100">
                 <a:solidFill>
                   <a:srgbClr val="64748B"/>
                 </a:solidFill>
               </a:defRPr>
             </a:pPr>
             <a:r>
-              <a:t>심사용 이메일·비밀번호 로그인 (구독 페이지)</a:t>
+              <a:t>심사용 이메일·비밀번호 로그인</a:t>
             </a:r>
           </a:p>
         </p:txBody>
       </p:sp>
       <p:pic>
         <p:nvPicPr>
-          <p:cNvPr id="4" name="Picture 3" descr="05_login.png"/>
+          <p:cNvPr id="4" name="Picture 3" descr="04_login.png"/>
           <p:cNvPicPr>
             <a:picLocks noChangeAspect="1"/>
           </p:cNvPicPr>
@@ -3746,8 +3732,8 @@
         </p:blipFill>
         <p:spPr>
           <a:xfrm>
-            <a:off x="457200" y="1097280"/>
-            <a:ext cx="8229600" cy="5579185"/>
+            <a:off x="320040" y="960120"/>
+            <a:ext cx="8503920" cy="5464432"/>
           </a:xfrm>
           <a:prstGeom prst="rect">
             <a:avLst/>
@@ -3762,8 +3748,8 @@
         </p:nvSpPr>
         <p:spPr>
           <a:xfrm>
-            <a:off x="457200" y="6263640"/>
-            <a:ext cx="8229600" cy="320040"/>
+            <a:off x="365760" y="6446520"/>
+            <a:ext cx="8412480" cy="274320"/>
           </a:xfrm>
           <a:prstGeom prst="rect">
             <a:avLst/>
@@ -3777,14 +3763,14 @@
           <a:lstStyle/>
           <a:p>
             <a:pPr>
-              <a:defRPr sz="1000">
+              <a:defRPr sz="900">
                 <a:solidFill>
                   <a:srgbClr val="64748B"/>
                 </a:solidFill>
               </a:defRPr>
             </a:pPr>
             <a:r>
-              <a:t>URL: https://ch2data.com/subscribe/</a:t>
+              <a:t>URL: https://ch2data.com/</a:t>
             </a:r>
           </a:p>
         </p:txBody>
@@ -3815,8 +3801,8 @@
         </p:nvSpPr>
         <p:spPr>
           <a:xfrm>
-            <a:off x="457200" y="228600"/>
-            <a:ext cx="8229600" cy="548640"/>
+            <a:off x="365760" y="182880"/>
+            <a:ext cx="8412480" cy="411480"/>
           </a:xfrm>
           <a:prstGeom prst="rect">
             <a:avLst/>
@@ -3830,14 +3816,14 @@
           <a:lstStyle/>
           <a:p>
             <a:pPr>
-              <a:defRPr sz="2200" b="1">
+              <a:defRPr sz="2000" b="1">
                 <a:solidFill>
                   <a:srgbClr val="3182CE"/>
                 </a:solidFill>
               </a:defRPr>
             </a:pPr>
             <a:r>
-              <a:t>⑤ 상품·요금</a:t>
+              <a:t>⑤ 구독 정책 (1/2)</a:t>
             </a:r>
           </a:p>
         </p:txBody>
@@ -3850,8 +3836,8 @@
         </p:nvSpPr>
         <p:spPr>
           <a:xfrm>
-            <a:off x="457200" y="731520"/>
-            <a:ext cx="8229600" cy="365760"/>
+            <a:off x="365760" y="566928"/>
+            <a:ext cx="8412480" cy="320040"/>
           </a:xfrm>
           <a:prstGeom prst="rect">
             <a:avLst/>
@@ -3865,21 +3851,21 @@
           <a:lstStyle/>
           <a:p>
             <a:pPr>
-              <a:defRPr sz="1200">
+              <a:defRPr sz="1100">
                 <a:solidFill>
                   <a:srgbClr val="64748B"/>
                 </a:solidFill>
               </a:defRPr>
             </a:pPr>
             <a:r>
-              <a:t>구독 상품명·금액·설명</a:t>
+              <a:t>상품·요금·무료 체험</a:t>
             </a:r>
           </a:p>
         </p:txBody>
       </p:sp>
       <p:pic>
         <p:nvPicPr>
-          <p:cNvPr id="4" name="Picture 3" descr="04_subscription.png"/>
+          <p:cNvPr id="4" name="Picture 3" descr="05_subscription_1.png"/>
           <p:cNvPicPr>
             <a:picLocks noChangeAspect="1"/>
           </p:cNvPicPr>
@@ -3893,8 +3879,8 @@
         </p:blipFill>
         <p:spPr>
           <a:xfrm>
-            <a:off x="457200" y="1097280"/>
-            <a:ext cx="8229600" cy="8883127"/>
+            <a:off x="320040" y="960120"/>
+            <a:ext cx="8503920" cy="5406300"/>
           </a:xfrm>
           <a:prstGeom prst="rect">
             <a:avLst/>
@@ -3909,8 +3895,8 @@
         </p:nvSpPr>
         <p:spPr>
           <a:xfrm>
-            <a:off x="457200" y="6263640"/>
-            <a:ext cx="8229600" cy="320040"/>
+            <a:off x="365760" y="6446520"/>
+            <a:ext cx="8412480" cy="274320"/>
           </a:xfrm>
           <a:prstGeom prst="rect">
             <a:avLst/>
@@ -3924,14 +3910,14 @@
           <a:lstStyle/>
           <a:p>
             <a:pPr>
-              <a:defRPr sz="1000">
+              <a:defRPr sz="900">
                 <a:solidFill>
                   <a:srgbClr val="64748B"/>
                 </a:solidFill>
               </a:defRPr>
             </a:pPr>
             <a:r>
-              <a:t>URL: https://ch2data.com/subscription/</a:t>
+              <a:t>URL: https://ch2data.com/</a:t>
             </a:r>
           </a:p>
         </p:txBody>
@@ -3962,8 +3948,8 @@
         </p:nvSpPr>
         <p:spPr>
           <a:xfrm>
-            <a:off x="457200" y="228600"/>
-            <a:ext cx="8229600" cy="548640"/>
+            <a:off x="365760" y="182880"/>
+            <a:ext cx="8412480" cy="411480"/>
           </a:xfrm>
           <a:prstGeom prst="rect">
             <a:avLst/>
@@ -3977,14 +3963,14 @@
           <a:lstStyle/>
           <a:p>
             <a:pPr>
-              <a:defRPr sz="2200" b="1">
+              <a:defRPr sz="2000" b="1">
                 <a:solidFill>
                   <a:srgbClr val="3182CE"/>
                 </a:solidFill>
               </a:defRPr>
             </a:pPr>
             <a:r>
-              <a:t>⑤ 구매 과정</a:t>
+              <a:t>⑤ 구독 정책 (2/2)</a:t>
             </a:r>
           </a:p>
         </p:txBody>
@@ -3997,8 +3983,8 @@
         </p:nvSpPr>
         <p:spPr>
           <a:xfrm>
-            <a:off x="457200" y="731520"/>
-            <a:ext cx="8229600" cy="365760"/>
+            <a:off x="365760" y="566928"/>
+            <a:ext cx="8412480" cy="320040"/>
           </a:xfrm>
           <a:prstGeom prst="rect">
             <a:avLst/>
@@ -4012,21 +3998,21 @@
           <a:lstStyle/>
           <a:p>
             <a:pPr>
-              <a:defRPr sz="1200">
+              <a:defRPr sz="1100">
                 <a:solidFill>
                   <a:srgbClr val="64748B"/>
                 </a:solidFill>
               </a:defRPr>
             </a:pPr>
             <a:r>
-              <a:t>로그인 후 상품 선택·결제 수단 선택</a:t>
+              <a:t>제품 추가·해제·결제 채널·해지</a:t>
             </a:r>
           </a:p>
         </p:txBody>
       </p:sp>
       <p:pic>
         <p:nvPicPr>
-          <p:cNvPr id="4" name="Picture 3" descr="06_subscribe_logged_in.png"/>
+          <p:cNvPr id="4" name="Picture 3" descr="05_subscription_2.png"/>
           <p:cNvPicPr>
             <a:picLocks noChangeAspect="1"/>
           </p:cNvPicPr>
@@ -4040,8 +4026,8 @@
         </p:blipFill>
         <p:spPr>
           <a:xfrm>
-            <a:off x="457200" y="1097280"/>
-            <a:ext cx="8229600" cy="5446059"/>
+            <a:off x="320040" y="960120"/>
+            <a:ext cx="8503920" cy="5447823"/>
           </a:xfrm>
           <a:prstGeom prst="rect">
             <a:avLst/>
@@ -4056,8 +4042,8 @@
         </p:nvSpPr>
         <p:spPr>
           <a:xfrm>
-            <a:off x="457200" y="6263640"/>
-            <a:ext cx="8229600" cy="320040"/>
+            <a:off x="365760" y="6446520"/>
+            <a:ext cx="8412480" cy="274320"/>
           </a:xfrm>
           <a:prstGeom prst="rect">
             <a:avLst/>
@@ -4071,14 +4057,14 @@
           <a:lstStyle/>
           <a:p>
             <a:pPr>
-              <a:defRPr sz="1000">
+              <a:defRPr sz="900">
                 <a:solidFill>
                   <a:srgbClr val="64748B"/>
                 </a:solidFill>
               </a:defRPr>
             </a:pPr>
             <a:r>
-              <a:t>URL: https://ch2data.com/subscribe/</a:t>
+              <a:t>URL: https://ch2data.com/</a:t>
             </a:r>
           </a:p>
         </p:txBody>
@@ -4109,8 +4095,8 @@
         </p:nvSpPr>
         <p:spPr>
           <a:xfrm>
-            <a:off x="457200" y="228600"/>
-            <a:ext cx="8229600" cy="548640"/>
+            <a:off x="365760" y="182880"/>
+            <a:ext cx="8412480" cy="411480"/>
           </a:xfrm>
           <a:prstGeom prst="rect">
             <a:avLst/>
@@ -4124,14 +4110,14 @@
           <a:lstStyle/>
           <a:p>
             <a:pPr>
-              <a:defRPr sz="2200" b="1">
+              <a:defRPr sz="2000" b="1">
                 <a:solidFill>
                   <a:srgbClr val="3182CE"/>
                 </a:solidFill>
               </a:defRPr>
             </a:pPr>
             <a:r>
-              <a:t>⑥ 카드 결제경로</a:t>
+              <a:t>⑤ 구매 과정</a:t>
             </a:r>
           </a:p>
         </p:txBody>
@@ -4144,8 +4130,8 @@
         </p:nvSpPr>
         <p:spPr>
           <a:xfrm>
-            <a:off x="457200" y="731520"/>
-            <a:ext cx="8229600" cy="365760"/>
+            <a:off x="365760" y="566928"/>
+            <a:ext cx="8412480" cy="320040"/>
           </a:xfrm>
           <a:prstGeom prst="rect">
             <a:avLst/>
@@ -4159,21 +4145,21 @@
           <a:lstStyle/>
           <a:p>
             <a:pPr>
-              <a:defRPr sz="1200">
+              <a:defRPr sz="1100">
                 <a:solidFill>
                   <a:srgbClr val="64748B"/>
                 </a:solidFill>
               </a:defRPr>
             </a:pPr>
             <a:r>
-              <a:t>카드 결제 버튼 클릭 후 결제창 (테스트 키 미활성 시 동일 화면)</a:t>
+              <a:t>로그인 후 구독 페이지 (카드 결제창·심사용)</a:t>
             </a:r>
           </a:p>
         </p:txBody>
       </p:sp>
       <p:pic>
         <p:nvPicPr>
-          <p:cNvPr id="4" name="Picture 3" descr="06_subscribe_logged_in.png"/>
+          <p:cNvPr id="4" name="Picture 3" descr="06_subscribe.png"/>
           <p:cNvPicPr>
             <a:picLocks noChangeAspect="1"/>
           </p:cNvPicPr>
@@ -4187,8 +4173,8 @@
         </p:blipFill>
         <p:spPr>
           <a:xfrm>
-            <a:off x="457200" y="1097280"/>
-            <a:ext cx="8229600" cy="5446059"/>
+            <a:off x="320040" y="960120"/>
+            <a:ext cx="8503920" cy="5793295"/>
           </a:xfrm>
           <a:prstGeom prst="rect">
             <a:avLst/>
@@ -4203,8 +4189,8 @@
         </p:nvSpPr>
         <p:spPr>
           <a:xfrm>
-            <a:off x="457200" y="6263640"/>
-            <a:ext cx="8229600" cy="320040"/>
+            <a:off x="365760" y="6446520"/>
+            <a:ext cx="8412480" cy="274320"/>
           </a:xfrm>
           <a:prstGeom prst="rect">
             <a:avLst/>
@@ -4218,7 +4204,154 @@
           <a:lstStyle/>
           <a:p>
             <a:pPr>
-              <a:defRPr sz="1000">
+              <a:defRPr sz="900">
+                <a:solidFill>
+                  <a:srgbClr val="64748B"/>
+                </a:solidFill>
+              </a:defRPr>
+            </a:pPr>
+            <a:r>
+              <a:t>URL: https://ch2data.com/subscribe/</a:t>
+            </a:r>
+          </a:p>
+        </p:txBody>
+      </p:sp>
+    </p:spTree>
+  </p:cSld>
+  <p:clrMapOvr>
+    <a:masterClrMapping/>
+  </p:clrMapOvr>
+</p:sld>
+</file>
+
+<file path=ppt/slides/slide9.xml><?xml version="1.0" encoding="utf-8"?>
+<p:sld xmlns:a="http://schemas.openxmlformats.org/drawingml/2006/main" xmlns:p="http://schemas.openxmlformats.org/presentationml/2006/main" xmlns:r="http://schemas.openxmlformats.org/officeDocument/2006/relationships">
+  <p:cSld>
+    <p:spTree>
+      <p:nvGrpSpPr>
+        <p:cNvPr id="1" name=""/>
+        <p:cNvGrpSpPr/>
+        <p:nvPr/>
+      </p:nvGrpSpPr>
+      <p:grpSpPr/>
+      <p:sp>
+        <p:nvSpPr>
+          <p:cNvPr id="2" name="TextBox 1"/>
+          <p:cNvSpPr txBox="1"/>
+          <p:nvPr/>
+        </p:nvSpPr>
+        <p:spPr>
+          <a:xfrm>
+            <a:off x="365760" y="182880"/>
+            <a:ext cx="8412480" cy="411480"/>
+          </a:xfrm>
+          <a:prstGeom prst="rect">
+            <a:avLst/>
+          </a:prstGeom>
+          <a:noFill/>
+        </p:spPr>
+        <p:txBody>
+          <a:bodyPr wrap="none">
+            <a:spAutoFit/>
+          </a:bodyPr>
+          <a:lstStyle/>
+          <a:p>
+            <a:pPr>
+              <a:defRPr sz="2000" b="1">
+                <a:solidFill>
+                  <a:srgbClr val="3182CE"/>
+                </a:solidFill>
+              </a:defRPr>
+            </a:pPr>
+            <a:r>
+              <a:t>⑥ 카드 결제경로</a:t>
+            </a:r>
+          </a:p>
+        </p:txBody>
+      </p:sp>
+      <p:sp>
+        <p:nvSpPr>
+          <p:cNvPr id="3" name="TextBox 2"/>
+          <p:cNvSpPr txBox="1"/>
+          <p:nvPr/>
+        </p:nvSpPr>
+        <p:spPr>
+          <a:xfrm>
+            <a:off x="365760" y="566928"/>
+            <a:ext cx="8412480" cy="320040"/>
+          </a:xfrm>
+          <a:prstGeom prst="rect">
+            <a:avLst/>
+          </a:prstGeom>
+          <a:noFill/>
+        </p:spPr>
+        <p:txBody>
+          <a:bodyPr wrap="none">
+            <a:spAutoFit/>
+          </a:bodyPr>
+          <a:lstStyle/>
+          <a:p>
+            <a:pPr>
+              <a:defRPr sz="1100">
+                <a:solidFill>
+                  <a:srgbClr val="64748B"/>
+                </a:solidFill>
+              </a:defRPr>
+            </a:pPr>
+            <a:r>
+              <a:t>테스트 키 · 카드 결제창(심사용) → 토스 결제창 (실제 결제 없음)</a:t>
+            </a:r>
+          </a:p>
+        </p:txBody>
+      </p:sp>
+      <p:pic>
+        <p:nvPicPr>
+          <p:cNvPr id="4" name="Picture 3" descr="07_payment_window.png"/>
+          <p:cNvPicPr>
+            <a:picLocks noChangeAspect="1"/>
+          </p:cNvPicPr>
+          <p:nvPr/>
+        </p:nvPicPr>
+        <p:blipFill>
+          <a:blip r:embed="rId2"/>
+          <a:stretch>
+            <a:fillRect/>
+          </a:stretch>
+        </p:blipFill>
+        <p:spPr>
+          <a:xfrm>
+            <a:off x="1808060" y="960120"/>
+            <a:ext cx="5527879" cy="5806440"/>
+          </a:xfrm>
+          <a:prstGeom prst="rect">
+            <a:avLst/>
+          </a:prstGeom>
+        </p:spPr>
+      </p:pic>
+      <p:sp>
+        <p:nvSpPr>
+          <p:cNvPr id="5" name="TextBox 4"/>
+          <p:cNvSpPr txBox="1"/>
+          <p:nvPr/>
+        </p:nvSpPr>
+        <p:spPr>
+          <a:xfrm>
+            <a:off x="365760" y="6446520"/>
+            <a:ext cx="8412480" cy="274320"/>
+          </a:xfrm>
+          <a:prstGeom prst="rect">
+            <a:avLst/>
+          </a:prstGeom>
+          <a:noFill/>
+        </p:spPr>
+        <p:txBody>
+          <a:bodyPr wrap="none">
+            <a:spAutoFit/>
+          </a:bodyPr>
+          <a:lstStyle/>
+          <a:p>
+            <a:pPr>
+              <a:defRPr sz="900">
                 <a:solidFill>
                   <a:srgbClr val="64748B"/>
                 </a:solidFill>
